--- a/Upwind SA Assessment Deck.pptx
+++ b/Upwind SA Assessment Deck.pptx
@@ -4592,7 +4592,7 @@
                 <a:ea typeface="IBM Plex Sans" pitchFamily="34" charset="-122"/>
                 <a:cs typeface="IBM Plex Sans" pitchFamily="34" charset="-120"/>
               </a:rPr>
-              <a:t>I switch on the hardened overlay:</a:t>
+              <a:t>Switching on the hardened overlay (what I would run):</a:t>
             </a:r>
             <a:endParaRPr lang="en-US" sz="1400" dirty="0"/>
           </a:p>
